--- a/relatorio_psicologo_curitiba.pptx
+++ b/relatorio_psicologo_curitiba.pptx
@@ -3314,7 +3314,7 @@
                     <a:lstStyle/>
                     <a:p>
                       <a:r>
-                        <a:t>Google Maps</a:t>
+                        <a:t>20 psiclogos</a:t>
                       </a:r>
                     </a:p>
                   </a:txBody>
@@ -3326,7 +3326,7 @@
                     <a:lstStyle/>
                     <a:p>
                       <a:r>
-                        <a:t>SEM SITE (OPORTUNIDA</a:t>
+                        <a:t>SITE ATIVO 📱</a:t>
                       </a:r>
                     </a:p>
                   </a:txBody>
@@ -3338,7 +3338,7 @@
                     <a:lstStyle/>
                     <a:p>
                       <a:r>
-                        <a:t>WhatsApp no Maps 📍</a:t>
+                        <a:t>(CU) 98877-6655</a:t>
                       </a:r>
                     </a:p>
                   </a:txBody>
@@ -3364,7 +3364,7 @@
                     <a:lstStyle/>
                     <a:p>
                       <a:r>
-                        <a:t>Google</a:t>
+                        <a:t>Psicloga online / Psiclog</a:t>
                       </a:r>
                     </a:p>
                   </a:txBody>
@@ -3376,7 +3376,7 @@
                     <a:lstStyle/>
                     <a:p>
                       <a:r>
-                        <a:t>SEM SITE (OPORTUNIDA</a:t>
+                        <a:t>SITE ATIVO 📱</a:t>
                       </a:r>
                     </a:p>
                   </a:txBody>
@@ -3388,7 +3388,7 @@
                     <a:lstStyle/>
                     <a:p>
                       <a:r>
-                        <a:t>WhatsApp no Maps 📍</a:t>
+                        <a:t>(CU) 98877-6655</a:t>
                       </a:r>
                     </a:p>
                   </a:txBody>
@@ -3414,7 +3414,7 @@
                     <a:lstStyle/>
                     <a:p>
                       <a:r>
-                        <a:t>20 psiclogos</a:t>
+                        <a:t>psicologo</a:t>
                       </a:r>
                     </a:p>
                   </a:txBody>
@@ -3438,7 +3438,7 @@
                     <a:lstStyle/>
                     <a:p>
                       <a:r>
-                        <a:t>WhatsApp no Maps 📍</a:t>
+                        <a:t>(41) 99644-0186</a:t>
                       </a:r>
                     </a:p>
                   </a:txBody>
@@ -3464,7 +3464,7 @@
                     <a:lstStyle/>
                     <a:p>
                       <a:r>
-                        <a:t>Yandex Maps: search for p</a:t>
+                        <a:t>AutoRank para Psiclogos</a:t>
                       </a:r>
                     </a:p>
                   </a:txBody>
@@ -3488,7 +3488,7 @@
                     <a:lstStyle/>
                     <a:p>
                       <a:r>
-                        <a:t>WhatsApp no Maps 📍</a:t>
+                        <a:t>(CU) 98877-6655</a:t>
                       </a:r>
                     </a:p>
                   </a:txBody>
@@ -3514,7 +3514,7 @@
                     <a:lstStyle/>
                     <a:p>
                       <a:r>
-                        <a:t>Psicloga online / Psiclog</a:t>
+                        <a:t>Psiclogos, Clnicas de Psi</a:t>
                       </a:r>
                     </a:p>
                   </a:txBody>
@@ -3538,7 +3538,7 @@
                     <a:lstStyle/>
                     <a:p>
                       <a:r>
-                        <a:t>WhatsApp no Maps 📍</a:t>
+                        <a:t>(CU) 98877-6655</a:t>
                       </a:r>
                     </a:p>
                   </a:txBody>
@@ -3564,7 +3564,7 @@
                     <a:lstStyle/>
                     <a:p>
                       <a:r>
-                        <a:t>AutoRank para Psiclogos</a:t>
+                        <a:t>Psiclogos Curitiba</a:t>
                       </a:r>
                     </a:p>
                   </a:txBody>
@@ -3588,7 +3588,7 @@
                     <a:lstStyle/>
                     <a:p>
                       <a:r>
-                        <a:t>WhatsApp no Maps 📍</a:t>
+                        <a:t>(CU) 98877-6655</a:t>
                       </a:r>
                     </a:p>
                   </a:txBody>
@@ -3614,7 +3614,7 @@
                     <a:lstStyle/>
                     <a:p>
                       <a:r>
-                        <a:t>10 melhores psiclogos par</a:t>
+                        <a:t>Psicologias / Psiclogos</a:t>
                       </a:r>
                     </a:p>
                   </a:txBody>
@@ -3626,7 +3626,7 @@
                     <a:lstStyle/>
                     <a:p>
                       <a:r>
-                        <a:t>SITE ATIVO 📱</a:t>
+                        <a:t>SEM SITE (OPORTUNIDA</a:t>
                       </a:r>
                     </a:p>
                   </a:txBody>
@@ -3638,7 +3638,7 @@
                     <a:lstStyle/>
                     <a:p>
                       <a:r>
-                        <a:t>WhatsApp no Maps 📍</a:t>
+                        <a:t>(CU) 98877-6655</a:t>
                       </a:r>
                     </a:p>
                   </a:txBody>
@@ -3664,7 +3664,7 @@
                     <a:lstStyle/>
                     <a:p>
                       <a:r>
-                        <a:t>Em busca de um psiclogo</a:t>
+                        <a:t>Psicloga</a:t>
                       </a:r>
                     </a:p>
                   </a:txBody>
@@ -3688,7 +3688,7 @@
                     <a:lstStyle/>
                     <a:p>
                       <a:r>
-                        <a:t>WhatsApp no Maps 📍</a:t>
+                        <a:t>(11) 98723-2712</a:t>
                       </a:r>
                     </a:p>
                   </a:txBody>
@@ -3714,7 +3714,7 @@
                     <a:lstStyle/>
                     <a:p>
                       <a:r>
-                        <a:t>Psiclogos</a:t>
+                        <a:t>Psiclogos, Curitiba, PR</a:t>
                       </a:r>
                     </a:p>
                   </a:txBody>
@@ -3738,7 +3738,7 @@
                     <a:lstStyle/>
                     <a:p>
                       <a:r>
-                        <a:t>WhatsApp no Maps 📍</a:t>
+                        <a:t>41999756</a:t>
                       </a:r>
                     </a:p>
                   </a:txBody>
@@ -3764,7 +3764,7 @@
                     <a:lstStyle/>
                     <a:p>
                       <a:r>
-                        <a:t>Psiclogos Curitiba</a:t>
+                        <a:t>Leonardo Fd Araujo</a:t>
                       </a:r>
                     </a:p>
                   </a:txBody>
@@ -3788,7 +3788,7 @@
                     <a:lstStyle/>
                     <a:p>
                       <a:r>
-                        <a:t>5541999756</a:t>
+                        <a:t>(41) 99643-9560</a:t>
                       </a:r>
                     </a:p>
                   </a:txBody>

--- a/relatorio_psicologo_curitiba.pptx
+++ b/relatorio_psicologo_curitiba.pptx
@@ -3314,7 +3314,7 @@
                     <a:lstStyle/>
                     <a:p>
                       <a:r>
-                        <a:t>20 psiclogos</a:t>
+                        <a:t>Psicloga online / Psiclog</a:t>
                       </a:r>
                     </a:p>
                   </a:txBody>
@@ -3364,7 +3364,7 @@
                     <a:lstStyle/>
                     <a:p>
                       <a:r>
-                        <a:t>Psicloga online / Psiclog</a:t>
+                        <a:t>AutoRank para Psiclogos</a:t>
                       </a:r>
                     </a:p>
                   </a:txBody>
@@ -3414,7 +3414,7 @@
                     <a:lstStyle/>
                     <a:p>
                       <a:r>
-                        <a:t>psicologo</a:t>
+                        <a:t>10 melhores psiclogos par</a:t>
                       </a:r>
                     </a:p>
                   </a:txBody>
@@ -3438,7 +3438,7 @@
                     <a:lstStyle/>
                     <a:p>
                       <a:r>
-                        <a:t>(41) 99644-0186</a:t>
+                        <a:t>(41) 99953-9370</a:t>
                       </a:r>
                     </a:p>
                   </a:txBody>
@@ -3464,7 +3464,7 @@
                     <a:lstStyle/>
                     <a:p>
                       <a:r>
-                        <a:t>AutoRank para Psiclogos</a:t>
+                        <a:t>Em busca de um psiclogo</a:t>
                       </a:r>
                     </a:p>
                   </a:txBody>
@@ -3514,7 +3514,7 @@
                     <a:lstStyle/>
                     <a:p>
                       <a:r>
-                        <a:t>Psiclogos, Clnicas de Psi</a:t>
+                        <a:t>20 psiclogos</a:t>
                       </a:r>
                     </a:p>
                   </a:txBody>
@@ -3614,7 +3614,7 @@
                     <a:lstStyle/>
                     <a:p>
                       <a:r>
-                        <a:t>Psicologias / Psiclogos</a:t>
+                        <a:t>Stelmach Psicologia</a:t>
                       </a:r>
                     </a:p>
                   </a:txBody>
@@ -3626,7 +3626,7 @@
                     <a:lstStyle/>
                     <a:p>
                       <a:r>
-                        <a:t>SEM SITE (OPORTUNIDA</a:t>
+                        <a:t>SITE ATIVO 📱</a:t>
                       </a:r>
                     </a:p>
                   </a:txBody>
@@ -3638,7 +3638,7 @@
                     <a:lstStyle/>
                     <a:p>
                       <a:r>
-                        <a:t>(CU) 98877-6655</a:t>
+                        <a:t>(41) 9219-2223</a:t>
                       </a:r>
                     </a:p>
                   </a:txBody>
@@ -3664,7 +3664,7 @@
                     <a:lstStyle/>
                     <a:p>
                       <a:r>
-                        <a:t>Psicloga</a:t>
+                        <a:t>Link to facebook.com</a:t>
                       </a:r>
                     </a:p>
                   </a:txBody>
@@ -3676,7 +3676,7 @@
                     <a:lstStyle/>
                     <a:p>
                       <a:r>
-                        <a:t>SITE ATIVO 📱</a:t>
+                        <a:t>SEM SITE PRÓPRIO (OP</a:t>
                       </a:r>
                     </a:p>
                   </a:txBody>
@@ -3688,7 +3688,7 @@
                     <a:lstStyle/>
                     <a:p>
                       <a:r>
-                        <a:t>(11) 98723-2712</a:t>
+                        <a:t>(CU) 98877-6655</a:t>
                       </a:r>
                     </a:p>
                   </a:txBody>
@@ -3714,7 +3714,7 @@
                     <a:lstStyle/>
                     <a:p>
                       <a:r>
-                        <a:t>Psiclogos, Curitiba, PR</a:t>
+                        <a:t>Psicologo</a:t>
                       </a:r>
                     </a:p>
                   </a:txBody>
@@ -3726,7 +3726,7 @@
                     <a:lstStyle/>
                     <a:p>
                       <a:r>
-                        <a:t>SITE ATIVO 📱</a:t>
+                        <a:t>SITE FORA DO AR (ERR</a:t>
                       </a:r>
                     </a:p>
                   </a:txBody>
@@ -3738,7 +3738,7 @@
                     <a:lstStyle/>
                     <a:p>
                       <a:r>
-                        <a:t>41999756</a:t>
+                        <a:t>(41) 98484-0002</a:t>
                       </a:r>
                     </a:p>
                   </a:txBody>
@@ -3764,7 +3764,7 @@
                     <a:lstStyle/>
                     <a:p>
                       <a:r>
-                        <a:t>Leonardo Fd Araujo</a:t>
+                        <a:t>Emily Ann Francisco Blum</a:t>
                       </a:r>
                     </a:p>
                   </a:txBody>
@@ -3788,7 +3788,7 @@
                     <a:lstStyle/>
                     <a:p>
                       <a:r>
-                        <a:t>(41) 99643-9560</a:t>
+                        <a:t>(41) 3248-4551</a:t>
                       </a:r>
                     </a:p>
                   </a:txBody>

--- a/relatorio_psicologo_curitiba.pptx
+++ b/relatorio_psicologo_curitiba.pptx
@@ -3213,7 +3213,7 @@
                 <a:gridCol w="2057400"/>
                 <a:gridCol w="2057400"/>
               </a:tblGrid>
-              <a:tr h="415636">
+              <a:tr h="653142">
                 <a:tc>
                   <a:txBody>
                     <a:bodyPr/>
@@ -3307,407 +3307,7 @@
                   </a:tcPr>
                 </a:tc>
               </a:tr>
-              <a:tr h="415636">
-                <a:tc>
-                  <a:txBody>
-                    <a:bodyPr/>
-                    <a:lstStyle/>
-                    <a:p>
-                      <a:r>
-                        <a:t>Psicloga online / Psiclog</a:t>
-                      </a:r>
-                    </a:p>
-                  </a:txBody>
-                  <a:tcPr/>
-                </a:tc>
-                <a:tc>
-                  <a:txBody>
-                    <a:bodyPr/>
-                    <a:lstStyle/>
-                    <a:p>
-                      <a:r>
-                        <a:t>SITE ATIVO 📱</a:t>
-                      </a:r>
-                    </a:p>
-                  </a:txBody>
-                  <a:tcPr/>
-                </a:tc>
-                <a:tc>
-                  <a:txBody>
-                    <a:bodyPr/>
-                    <a:lstStyle/>
-                    <a:p>
-                      <a:r>
-                        <a:t>(CU) 98877-6655</a:t>
-                      </a:r>
-                    </a:p>
-                  </a:txBody>
-                  <a:tcPr/>
-                </a:tc>
-                <a:tc>
-                  <a:txBody>
-                    <a:bodyPr/>
-                    <a:lstStyle/>
-                    <a:p>
-                      <a:r>
-                        <a:t>Enviar 1ª Msg (100% Grátis)</a:t>
-                      </a:r>
-                    </a:p>
-                  </a:txBody>
-                  <a:tcPr/>
-                </a:tc>
-              </a:tr>
-              <a:tr h="415636">
-                <a:tc>
-                  <a:txBody>
-                    <a:bodyPr/>
-                    <a:lstStyle/>
-                    <a:p>
-                      <a:r>
-                        <a:t>AutoRank para Psiclogos</a:t>
-                      </a:r>
-                    </a:p>
-                  </a:txBody>
-                  <a:tcPr/>
-                </a:tc>
-                <a:tc>
-                  <a:txBody>
-                    <a:bodyPr/>
-                    <a:lstStyle/>
-                    <a:p>
-                      <a:r>
-                        <a:t>SITE ATIVO 📱</a:t>
-                      </a:r>
-                    </a:p>
-                  </a:txBody>
-                  <a:tcPr/>
-                </a:tc>
-                <a:tc>
-                  <a:txBody>
-                    <a:bodyPr/>
-                    <a:lstStyle/>
-                    <a:p>
-                      <a:r>
-                        <a:t>(CU) 98877-6655</a:t>
-                      </a:r>
-                    </a:p>
-                  </a:txBody>
-                  <a:tcPr/>
-                </a:tc>
-                <a:tc>
-                  <a:txBody>
-                    <a:bodyPr/>
-                    <a:lstStyle/>
-                    <a:p>
-                      <a:r>
-                        <a:t>Enviar 1ª Msg (100% Grátis)</a:t>
-                      </a:r>
-                    </a:p>
-                  </a:txBody>
-                  <a:tcPr/>
-                </a:tc>
-              </a:tr>
-              <a:tr h="415636">
-                <a:tc>
-                  <a:txBody>
-                    <a:bodyPr/>
-                    <a:lstStyle/>
-                    <a:p>
-                      <a:r>
-                        <a:t>10 melhores psiclogos par</a:t>
-                      </a:r>
-                    </a:p>
-                  </a:txBody>
-                  <a:tcPr/>
-                </a:tc>
-                <a:tc>
-                  <a:txBody>
-                    <a:bodyPr/>
-                    <a:lstStyle/>
-                    <a:p>
-                      <a:r>
-                        <a:t>SITE ATIVO 📱</a:t>
-                      </a:r>
-                    </a:p>
-                  </a:txBody>
-                  <a:tcPr/>
-                </a:tc>
-                <a:tc>
-                  <a:txBody>
-                    <a:bodyPr/>
-                    <a:lstStyle/>
-                    <a:p>
-                      <a:r>
-                        <a:t>(41) 99953-9370</a:t>
-                      </a:r>
-                    </a:p>
-                  </a:txBody>
-                  <a:tcPr/>
-                </a:tc>
-                <a:tc>
-                  <a:txBody>
-                    <a:bodyPr/>
-                    <a:lstStyle/>
-                    <a:p>
-                      <a:r>
-                        <a:t>Enviar 1ª Msg (100% Grátis)</a:t>
-                      </a:r>
-                    </a:p>
-                  </a:txBody>
-                  <a:tcPr/>
-                </a:tc>
-              </a:tr>
-              <a:tr h="415636">
-                <a:tc>
-                  <a:txBody>
-                    <a:bodyPr/>
-                    <a:lstStyle/>
-                    <a:p>
-                      <a:r>
-                        <a:t>Em busca de um psiclogo</a:t>
-                      </a:r>
-                    </a:p>
-                  </a:txBody>
-                  <a:tcPr/>
-                </a:tc>
-                <a:tc>
-                  <a:txBody>
-                    <a:bodyPr/>
-                    <a:lstStyle/>
-                    <a:p>
-                      <a:r>
-                        <a:t>SITE ATIVO 📱</a:t>
-                      </a:r>
-                    </a:p>
-                  </a:txBody>
-                  <a:tcPr/>
-                </a:tc>
-                <a:tc>
-                  <a:txBody>
-                    <a:bodyPr/>
-                    <a:lstStyle/>
-                    <a:p>
-                      <a:r>
-                        <a:t>(CU) 98877-6655</a:t>
-                      </a:r>
-                    </a:p>
-                  </a:txBody>
-                  <a:tcPr/>
-                </a:tc>
-                <a:tc>
-                  <a:txBody>
-                    <a:bodyPr/>
-                    <a:lstStyle/>
-                    <a:p>
-                      <a:r>
-                        <a:t>Enviar 1ª Msg (100% Grátis)</a:t>
-                      </a:r>
-                    </a:p>
-                  </a:txBody>
-                  <a:tcPr/>
-                </a:tc>
-              </a:tr>
-              <a:tr h="415636">
-                <a:tc>
-                  <a:txBody>
-                    <a:bodyPr/>
-                    <a:lstStyle/>
-                    <a:p>
-                      <a:r>
-                        <a:t>20 psiclogos</a:t>
-                      </a:r>
-                    </a:p>
-                  </a:txBody>
-                  <a:tcPr/>
-                </a:tc>
-                <a:tc>
-                  <a:txBody>
-                    <a:bodyPr/>
-                    <a:lstStyle/>
-                    <a:p>
-                      <a:r>
-                        <a:t>SITE ATIVO 📱</a:t>
-                      </a:r>
-                    </a:p>
-                  </a:txBody>
-                  <a:tcPr/>
-                </a:tc>
-                <a:tc>
-                  <a:txBody>
-                    <a:bodyPr/>
-                    <a:lstStyle/>
-                    <a:p>
-                      <a:r>
-                        <a:t>(CU) 98877-6655</a:t>
-                      </a:r>
-                    </a:p>
-                  </a:txBody>
-                  <a:tcPr/>
-                </a:tc>
-                <a:tc>
-                  <a:txBody>
-                    <a:bodyPr/>
-                    <a:lstStyle/>
-                    <a:p>
-                      <a:r>
-                        <a:t>Enviar 1ª Msg (100% Grátis)</a:t>
-                      </a:r>
-                    </a:p>
-                  </a:txBody>
-                  <a:tcPr/>
-                </a:tc>
-              </a:tr>
-              <a:tr h="415636">
-                <a:tc>
-                  <a:txBody>
-                    <a:bodyPr/>
-                    <a:lstStyle/>
-                    <a:p>
-                      <a:r>
-                        <a:t>Psiclogos Curitiba</a:t>
-                      </a:r>
-                    </a:p>
-                  </a:txBody>
-                  <a:tcPr/>
-                </a:tc>
-                <a:tc>
-                  <a:txBody>
-                    <a:bodyPr/>
-                    <a:lstStyle/>
-                    <a:p>
-                      <a:r>
-                        <a:t>SITE ATIVO 📱</a:t>
-                      </a:r>
-                    </a:p>
-                  </a:txBody>
-                  <a:tcPr/>
-                </a:tc>
-                <a:tc>
-                  <a:txBody>
-                    <a:bodyPr/>
-                    <a:lstStyle/>
-                    <a:p>
-                      <a:r>
-                        <a:t>(CU) 98877-6655</a:t>
-                      </a:r>
-                    </a:p>
-                  </a:txBody>
-                  <a:tcPr/>
-                </a:tc>
-                <a:tc>
-                  <a:txBody>
-                    <a:bodyPr/>
-                    <a:lstStyle/>
-                    <a:p>
-                      <a:r>
-                        <a:t>Enviar 1ª Msg (100% Grátis)</a:t>
-                      </a:r>
-                    </a:p>
-                  </a:txBody>
-                  <a:tcPr/>
-                </a:tc>
-              </a:tr>
-              <a:tr h="415636">
-                <a:tc>
-                  <a:txBody>
-                    <a:bodyPr/>
-                    <a:lstStyle/>
-                    <a:p>
-                      <a:r>
-                        <a:t>Stelmach Psicologia</a:t>
-                      </a:r>
-                    </a:p>
-                  </a:txBody>
-                  <a:tcPr/>
-                </a:tc>
-                <a:tc>
-                  <a:txBody>
-                    <a:bodyPr/>
-                    <a:lstStyle/>
-                    <a:p>
-                      <a:r>
-                        <a:t>SITE ATIVO 📱</a:t>
-                      </a:r>
-                    </a:p>
-                  </a:txBody>
-                  <a:tcPr/>
-                </a:tc>
-                <a:tc>
-                  <a:txBody>
-                    <a:bodyPr/>
-                    <a:lstStyle/>
-                    <a:p>
-                      <a:r>
-                        <a:t>(41) 9219-2223</a:t>
-                      </a:r>
-                    </a:p>
-                  </a:txBody>
-                  <a:tcPr/>
-                </a:tc>
-                <a:tc>
-                  <a:txBody>
-                    <a:bodyPr/>
-                    <a:lstStyle/>
-                    <a:p>
-                      <a:r>
-                        <a:t>Enviar 1ª Msg (100% Grátis)</a:t>
-                      </a:r>
-                    </a:p>
-                  </a:txBody>
-                  <a:tcPr/>
-                </a:tc>
-              </a:tr>
-              <a:tr h="415636">
-                <a:tc>
-                  <a:txBody>
-                    <a:bodyPr/>
-                    <a:lstStyle/>
-                    <a:p>
-                      <a:r>
-                        <a:t>Link to facebook.com</a:t>
-                      </a:r>
-                    </a:p>
-                  </a:txBody>
-                  <a:tcPr/>
-                </a:tc>
-                <a:tc>
-                  <a:txBody>
-                    <a:bodyPr/>
-                    <a:lstStyle/>
-                    <a:p>
-                      <a:r>
-                        <a:t>SEM SITE PRÓPRIO (OP</a:t>
-                      </a:r>
-                    </a:p>
-                  </a:txBody>
-                  <a:tcPr/>
-                </a:tc>
-                <a:tc>
-                  <a:txBody>
-                    <a:bodyPr/>
-                    <a:lstStyle/>
-                    <a:p>
-                      <a:r>
-                        <a:t>(CU) 98877-6655</a:t>
-                      </a:r>
-                    </a:p>
-                  </a:txBody>
-                  <a:tcPr/>
-                </a:tc>
-                <a:tc>
-                  <a:txBody>
-                    <a:bodyPr/>
-                    <a:lstStyle/>
-                    <a:p>
-                      <a:r>
-                        <a:t>Enviar 1ª Msg (100% Grátis)</a:t>
-                      </a:r>
-                    </a:p>
-                  </a:txBody>
-                  <a:tcPr/>
-                </a:tc>
-              </a:tr>
-              <a:tr h="415636">
+              <a:tr h="653142">
                 <a:tc>
                   <a:txBody>
                     <a:bodyPr/>
@@ -3738,7 +3338,7 @@
                     <a:lstStyle/>
                     <a:p>
                       <a:r>
-                        <a:t>(41) 98484-0002</a:t>
+                        <a:t>(41) 99964-8723</a:t>
                       </a:r>
                     </a:p>
                   </a:txBody>
@@ -3757,14 +3357,14 @@
                   <a:tcPr/>
                 </a:tc>
               </a:tr>
-              <a:tr h="415640">
+              <a:tr h="653142">
                 <a:tc>
                   <a:txBody>
                     <a:bodyPr/>
                     <a:lstStyle/>
                     <a:p>
                       <a:r>
-                        <a:t>Emily Ann Francisco Blum</a:t>
+                        <a:t>Photoacompanhantes.com</a:t>
                       </a:r>
                     </a:p>
                   </a:txBody>
@@ -3788,7 +3388,207 @@
                     <a:lstStyle/>
                     <a:p>
                       <a:r>
-                        <a:t>(41) 3248-4551</a:t>
+                        <a:t>(31) 98402-7219</a:t>
+                      </a:r>
+                    </a:p>
+                  </a:txBody>
+                  <a:tcPr/>
+                </a:tc>
+                <a:tc>
+                  <a:txBody>
+                    <a:bodyPr/>
+                    <a:lstStyle/>
+                    <a:p>
+                      <a:r>
+                        <a:t>Enviar 1ª Msg (100% Grátis)</a:t>
+                      </a:r>
+                    </a:p>
+                  </a:txBody>
+                  <a:tcPr/>
+                </a:tc>
+              </a:tr>
+              <a:tr h="653142">
+                <a:tc>
+                  <a:txBody>
+                    <a:bodyPr/>
+                    <a:lstStyle/>
+                    <a:p>
+                      <a:r>
+                        <a:t>Consultrio</a:t>
+                      </a:r>
+                    </a:p>
+                  </a:txBody>
+                  <a:tcPr/>
+                </a:tc>
+                <a:tc>
+                  <a:txBody>
+                    <a:bodyPr/>
+                    <a:lstStyle/>
+                    <a:p>
+                      <a:r>
+                        <a:t>SITE ATIVO 📱</a:t>
+                      </a:r>
+                    </a:p>
+                  </a:txBody>
+                  <a:tcPr/>
+                </a:tc>
+                <a:tc>
+                  <a:txBody>
+                    <a:bodyPr/>
+                    <a:lstStyle/>
+                    <a:p>
+                      <a:r>
+                        <a:t>(82) 99102-9014</a:t>
+                      </a:r>
+                    </a:p>
+                  </a:txBody>
+                  <a:tcPr/>
+                </a:tc>
+                <a:tc>
+                  <a:txBody>
+                    <a:bodyPr/>
+                    <a:lstStyle/>
+                    <a:p>
+                      <a:r>
+                        <a:t>Enviar 1ª Msg (100% Grátis)</a:t>
+                      </a:r>
+                    </a:p>
+                  </a:txBody>
+                  <a:tcPr/>
+                </a:tc>
+              </a:tr>
+              <a:tr h="653142">
+                <a:tc>
+                  <a:txBody>
+                    <a:bodyPr/>
+                    <a:lstStyle/>
+                    <a:p>
+                      <a:r>
+                        <a:t>Salrio</a:t>
+                      </a:r>
+                    </a:p>
+                  </a:txBody>
+                  <a:tcPr/>
+                </a:tc>
+                <a:tc>
+                  <a:txBody>
+                    <a:bodyPr/>
+                    <a:lstStyle/>
+                    <a:p>
+                      <a:r>
+                        <a:t>SITE ATIVO 📱</a:t>
+                      </a:r>
+                    </a:p>
+                  </a:txBody>
+                  <a:tcPr/>
+                </a:tc>
+                <a:tc>
+                  <a:txBody>
+                    <a:bodyPr/>
+                    <a:lstStyle/>
+                    <a:p>
+                      <a:r>
+                        <a:t>(41) 99285-5589</a:t>
+                      </a:r>
+                    </a:p>
+                  </a:txBody>
+                  <a:tcPr/>
+                </a:tc>
+                <a:tc>
+                  <a:txBody>
+                    <a:bodyPr/>
+                    <a:lstStyle/>
+                    <a:p>
+                      <a:r>
+                        <a:t>Enviar 1ª Msg (100% Grátis)</a:t>
+                      </a:r>
+                    </a:p>
+                  </a:txBody>
+                  <a:tcPr/>
+                </a:tc>
+              </a:tr>
+              <a:tr h="653142">
+                <a:tc>
+                  <a:txBody>
+                    <a:bodyPr/>
+                    <a:lstStyle/>
+                    <a:p>
+                      <a:r>
+                        <a:t>Psicloga Clnica</a:t>
+                      </a:r>
+                    </a:p>
+                  </a:txBody>
+                  <a:tcPr/>
+                </a:tc>
+                <a:tc>
+                  <a:txBody>
+                    <a:bodyPr/>
+                    <a:lstStyle/>
+                    <a:p>
+                      <a:r>
+                        <a:t>SITE ATIVO 📱</a:t>
+                      </a:r>
+                    </a:p>
+                  </a:txBody>
+                  <a:tcPr/>
+                </a:tc>
+                <a:tc>
+                  <a:txBody>
+                    <a:bodyPr/>
+                    <a:lstStyle/>
+                    <a:p>
+                      <a:r>
+                        <a:t>(41) 98744-3208</a:t>
+                      </a:r>
+                    </a:p>
+                  </a:txBody>
+                  <a:tcPr/>
+                </a:tc>
+                <a:tc>
+                  <a:txBody>
+                    <a:bodyPr/>
+                    <a:lstStyle/>
+                    <a:p>
+                      <a:r>
+                        <a:t>Enviar 1ª Msg (100% Grátis)</a:t>
+                      </a:r>
+                    </a:p>
+                  </a:txBody>
+                  <a:tcPr/>
+                </a:tc>
+              </a:tr>
+              <a:tr h="653148">
+                <a:tc>
+                  <a:txBody>
+                    <a:bodyPr/>
+                    <a:lstStyle/>
+                    <a:p>
+                      <a:r>
+                        <a:t>Psiclogo Perto de Mim em </a:t>
+                      </a:r>
+                    </a:p>
+                  </a:txBody>
+                  <a:tcPr/>
+                </a:tc>
+                <a:tc>
+                  <a:txBody>
+                    <a:bodyPr/>
+                    <a:lstStyle/>
+                    <a:p>
+                      <a:r>
+                        <a:t>SITE ATIVO 📱</a:t>
+                      </a:r>
+                    </a:p>
+                  </a:txBody>
+                  <a:tcPr/>
+                </a:tc>
+                <a:tc>
+                  <a:txBody>
+                    <a:bodyPr/>
+                    <a:lstStyle/>
+                    <a:p>
+                      <a:r>
+                        <a:t>(41) 99285-5589</a:t>
                       </a:r>
                     </a:p>
                   </a:txBody>
